--- a/exports/pptx/lessons/middle-module-08-yoga/day-10-final-assessment.pptx
+++ b/exports/pptx/lessons/middle-module-08-yoga/day-10-final-assessment.pptx
@@ -17,9 +17,10 @@
     <p:sldId id="265" r:id="rId11"/>
     <p:sldId id="266" r:id="rId12"/>
     <p:sldId id="267" r:id="rId13"/>
+    <p:sldId id="268" r:id="rId14"/>
   </p:sldIdLst>
   <p:notesMasterIdLst>
-    <p:notesMasterId r:id="rId14"/>
+    <p:notesMasterId r:id="rId15"/>
   </p:notesMasterIdLst>
   <p:sldSz cx="9144000" cy="5143500"/>
   <p:notesSz cx="5143500" cy="9144000"/>
@@ -801,6 +802,94 @@
             <a:fld id="{F7021451-1387-4CA6-816F-3879F97B5CBC}" type="slidenum">
               <a:rPr lang="en-US"/>
               <a:t>12</a:t>
+            </a:fld>
+            <a:endParaRPr lang="en-US"/>
+          </a:p>
+        </p:txBody>
+      </p:sp>
+    </p:spTree>
+    <p:extLst>
+      <p:ext uri="{BB962C8B-B14F-4D97-AF65-F5344CB8AC3E}">
+        <p14:creationId xmlns:p14="http://schemas.microsoft.com/office/powerpoint/2010/main" val="1024086991"/>
+      </p:ext>
+    </p:extLst>
+  </p:cSld>
+  <p:clrMapOvr>
+    <a:masterClrMapping/>
+  </p:clrMapOvr>
+</p:notes>
+</file>
+
+<file path=ppt/notesSlides/notesSlide13.xml><?xml version="1.0" encoding="utf-8"?>
+<p:notes xmlns:a="http://schemas.openxmlformats.org/drawingml/2006/main" xmlns:r="http://schemas.openxmlformats.org/officeDocument/2006/relationships" xmlns:p="http://schemas.openxmlformats.org/presentationml/2006/main">
+  <p:cSld>
+    <p:spTree>
+      <p:nvGrpSpPr>
+        <p:cNvPr id="1" name=""/>
+        <p:cNvGrpSpPr/>
+        <p:nvPr/>
+      </p:nvGrpSpPr>
+      <p:grpSpPr>
+        <a:xfrm>
+          <a:off x="0" y="0"/>
+          <a:ext cx="0" cy="0"/>
+          <a:chOff x="0" y="0"/>
+          <a:chExt cx="0" cy="0"/>
+        </a:xfrm>
+      </p:grpSpPr>
+      <p:sp>
+        <p:nvSpPr>
+          <p:cNvPr id="2" name="Slide Image Placeholder 1"/>
+          <p:cNvSpPr>
+            <a:spLocks noGrp="1" noRot="1" noChangeAspect="1"/>
+          </p:cNvSpPr>
+          <p:nvPr>
+            <p:ph type="sldImg"/>
+          </p:nvPr>
+        </p:nvSpPr>
+        <p:spPr/>
+      </p:sp>
+      <p:sp>
+        <p:nvSpPr>
+          <p:cNvPr id="3" name="Notes Placeholder 2"/>
+          <p:cNvSpPr>
+            <a:spLocks noGrp="1"/>
+          </p:cNvSpPr>
+          <p:nvPr>
+            <p:ph type="body" idx="1"/>
+          </p:nvPr>
+        </p:nvSpPr>
+        <p:spPr/>
+        <p:txBody>
+          <a:bodyPr/>
+          <a:lstStyle/>
+          <a:p>
+            <a:r>
+              <a:rPr lang="en-US" dirty="0"/>
+              <a:t/>
+            </a:r>
+            <a:endParaRPr lang="en-US" dirty="0"/>
+          </a:p>
+        </p:txBody>
+      </p:sp>
+      <p:sp>
+        <p:nvSpPr>
+          <p:cNvPr id="4" name="Slide Number Placeholder 3"/>
+          <p:cNvSpPr>
+            <a:spLocks noGrp="1"/>
+          </p:cNvSpPr>
+          <p:nvPr>
+            <p:ph type="sldNum" sz="quarter" idx="10"/>
+          </p:nvPr>
+        </p:nvSpPr>
+        <p:spPr/>
+        <p:txBody>
+          <a:bodyPr/>
+          <a:lstStyle/>
+          <a:p>
+            <a:fld id="{F7021451-1387-4CA6-816F-3879F97B5CBC}" type="slidenum">
+              <a:rPr lang="en-US"/>
+              <a:t>13</a:t>
             </a:fld>
             <a:endParaRPr lang="en-US"/>
           </a:p>
@@ -2100,102 +2189,6 @@
         </p:nvSpPr>
         <p:spPr>
           <a:xfrm>
-            <a:off x="406301" y="1223963"/>
-            <a:ext cx="8498026" cy="274290"/>
-          </a:xfrm>
-          <a:prstGeom prst="rect">
-            <a:avLst/>
-          </a:prstGeom>
-          <a:noFill/>
-          <a:ln/>
-        </p:spPr>
-        <p:txBody>
-          <a:bodyPr wrap="square" lIns="0" tIns="0" rIns="0" bIns="0" rtlCol="0" anchor="t"/>
-          <a:lstStyle/>
-          <a:p>
-            <a:pPr algn="l" indent="0" marL="0">
-              <a:lnSpc>
-                <a:spcPts val="2160"/>
-              </a:lnSpc>
-              <a:spcBef>
-                <a:spcPts val="600"/>
-              </a:spcBef>
-              <a:spcAft>
-                <a:spcPts val="800"/>
-              </a:spcAft>
-              <a:buNone/>
-            </a:pPr>
-            <a:r>
-              <a:rPr lang="en-US" sz="1800" b="1" dirty="0">
-                <a:solidFill>
-                  <a:srgbClr val="FE4447"/>
-                </a:solidFill>
-                <a:latin typeface="Georgia" pitchFamily="34" charset="0"/>
-                <a:ea typeface="Georgia" pitchFamily="34" charset="-122"/>
-                <a:cs typeface="Georgia" pitchFamily="34" charset="-120"/>
-              </a:rPr>
-              <a:t>Learning objective</a:t>
-            </a:r>
-            <a:endParaRPr lang="en-US" sz="1800" dirty="0"/>
-          </a:p>
-        </p:txBody>
-      </p:sp>
-      <p:sp>
-        <p:nvSpPr>
-          <p:cNvPr id="6" name="Text 4"/>
-          <p:cNvSpPr/>
-          <p:nvPr/>
-        </p:nvSpPr>
-        <p:spPr>
-          <a:xfrm>
-            <a:off x="406301" y="1637854"/>
-            <a:ext cx="8498026" cy="426541"/>
-          </a:xfrm>
-          <a:prstGeom prst="rect">
-            <a:avLst/>
-          </a:prstGeom>
-          <a:noFill/>
-          <a:ln/>
-        </p:spPr>
-        <p:txBody>
-          <a:bodyPr wrap="square" lIns="0" tIns="0" rIns="0" bIns="0" rtlCol="0" anchor="t"/>
-          <a:lstStyle/>
-          <a:p>
-            <a:pPr algn="l" indent="0" marL="0">
-              <a:lnSpc>
-                <a:spcPts val="1680"/>
-              </a:lnSpc>
-              <a:spcBef>
-                <a:spcPts val="300"/>
-              </a:spcBef>
-              <a:spcAft>
-                <a:spcPts val="300"/>
-              </a:spcAft>
-              <a:buNone/>
-            </a:pPr>
-            <a:r>
-              <a:rPr lang="en-US" sz="1200" dirty="0">
-                <a:solidFill>
-                  <a:srgbClr val="1C2833"/>
-                </a:solidFill>
-                <a:latin typeface="Arial" pitchFamily="34" charset="0"/>
-                <a:ea typeface="Arial" pitchFamily="34" charset="-122"/>
-                <a:cs typeface="Arial" pitchFamily="34" charset="-120"/>
-              </a:rPr>
-              <a:t>By the end of this lesson, students will demonstrate mastery via a summative quiz and a 5-minute routine they lead the class through.</a:t>
-            </a:r>
-            <a:endParaRPr lang="en-US" sz="1200" dirty="0"/>
-          </a:p>
-        </p:txBody>
-      </p:sp>
-      <p:sp>
-        <p:nvSpPr>
-          <p:cNvPr id="7" name="Text 5"/>
-          <p:cNvSpPr/>
-          <p:nvPr/>
-        </p:nvSpPr>
-        <p:spPr>
-          <a:xfrm>
             <a:off x="406301" y="4434929"/>
             <a:ext cx="8498026" cy="213271"/>
           </a:xfrm>
@@ -2340,7 +2333,7 @@
                 <a:ea typeface="Georgia" pitchFamily="34" charset="-122"/>
                 <a:cs typeface="Georgia" pitchFamily="34" charset="-120"/>
               </a:rPr>
-              <a:t>Differentiation</a:t>
+              <a:t>Homework</a:t>
             </a:r>
             <a:endParaRPr lang="en-US" sz="1800" dirty="0"/>
           </a:p>
@@ -2355,7 +2348,7 @@
         <p:spPr>
           <a:xfrm>
             <a:off x="634901" y="883593"/>
-            <a:ext cx="8102798" cy="731341"/>
+            <a:ext cx="8102798" cy="281880"/>
           </a:xfrm>
           <a:prstGeom prst="rect">
             <a:avLst/>
@@ -2378,7 +2371,7 @@
               <a:buChar char="•"/>
             </a:pPr>
             <a:r>
-              <a:rPr lang="en-US" sz="1200" b="1" dirty="0">
+              <a:rPr lang="en-US" sz="1200" dirty="0">
                 <a:solidFill>
                   <a:srgbClr val="1C2833"/>
                 </a:solidFill>
@@ -2386,71 +2379,7 @@
                 <a:ea typeface="Arial" pitchFamily="34" charset="-122"/>
                 <a:cs typeface="Arial" pitchFamily="34" charset="-120"/>
               </a:rPr>
-              <a:t>Tier up:</a:t>
-            </a:r>
-            <a:pPr algn="l" indent="0" marL="0">
-              <a:lnSpc>
-                <a:spcPts val="1620"/>
-              </a:lnSpc>
-              <a:spcAft>
-                <a:spcPts val="300"/>
-              </a:spcAft>
-              <a:buNone/>
-            </a:pPr>
-            <a:r>
-              <a:rPr lang="en-US" sz="1200" dirty="0">
-                <a:solidFill>
-                  <a:srgbClr val="1C2833"/>
-                </a:solidFill>
-                <a:latin typeface="Arial" pitchFamily="34" charset="0"/>
-                <a:ea typeface="Arial" pitchFamily="34" charset="-122"/>
-                <a:cs typeface="Arial" pitchFamily="34" charset="-120"/>
-              </a:rPr>
-              <a:t> Students who finish quiz early write a 1-paragraph "what should change for Grade 11 students?" — input for Senior band.</a:t>
-            </a:r>
-            <a:endParaRPr lang="en-US" sz="1200" dirty="0"/>
-          </a:p>
-          <a:p>
-            <a:pPr algn="l" marL="342900" indent="-342900">
-              <a:lnSpc>
-                <a:spcPts val="1620"/>
-              </a:lnSpc>
-              <a:spcAft>
-                <a:spcPts val="300"/>
-              </a:spcAft>
-              <a:buSzPct val="100000"/>
-              <a:buChar char="•"/>
-            </a:pPr>
-            <a:r>
-              <a:rPr lang="en-US" sz="1200" b="1" dirty="0">
-                <a:solidFill>
-                  <a:srgbClr val="1C2833"/>
-                </a:solidFill>
-                <a:latin typeface="Arial" pitchFamily="34" charset="0"/>
-                <a:ea typeface="Arial" pitchFamily="34" charset="-122"/>
-                <a:cs typeface="Arial" pitchFamily="34" charset="-120"/>
-              </a:rPr>
-              <a:t>Tier down:</a:t>
-            </a:r>
-            <a:pPr algn="l" indent="0" marL="0">
-              <a:lnSpc>
-                <a:spcPts val="1620"/>
-              </a:lnSpc>
-              <a:spcAft>
-                <a:spcPts val="300"/>
-              </a:spcAft>
-              <a:buNone/>
-            </a:pPr>
-            <a:r>
-              <a:rPr lang="en-US" sz="1200" dirty="0">
-                <a:solidFill>
-                  <a:srgbClr val="1C2833"/>
-                </a:solidFill>
-                <a:latin typeface="Arial" pitchFamily="34" charset="0"/>
-                <a:ea typeface="Arial" pitchFamily="34" charset="-122"/>
-                <a:cs typeface="Arial" pitchFamily="34" charset="-120"/>
-              </a:rPr>
-              <a:t> Open-notebook quiz for students with documented learning needs.</a:t>
+              <a:t>None. Module complete.</a:t>
             </a:r>
             <a:endParaRPr lang="en-US" sz="1200" dirty="0"/>
           </a:p>
@@ -2608,7 +2537,7 @@
                 <a:ea typeface="Georgia" pitchFamily="34" charset="-122"/>
                 <a:cs typeface="Georgia" pitchFamily="34" charset="-120"/>
               </a:rPr>
-              <a:t>Teacher notes</a:t>
+              <a:t>Differentiation</a:t>
             </a:r>
             <a:endParaRPr lang="en-US" sz="1800" dirty="0"/>
           </a:p>
@@ -2622,8 +2551,8 @@
         </p:nvSpPr>
         <p:spPr>
           <a:xfrm>
-            <a:off x="406301" y="870942"/>
-            <a:ext cx="8498026" cy="426541"/>
+            <a:off x="634901" y="883593"/>
+            <a:ext cx="8102798" cy="731341"/>
           </a:xfrm>
           <a:prstGeom prst="rect">
             <a:avLst/>
@@ -2635,20 +2564,18 @@
           <a:bodyPr wrap="square" lIns="0" tIns="0" rIns="0" bIns="0" rtlCol="0" anchor="t"/>
           <a:lstStyle/>
           <a:p>
-            <a:pPr algn="l" indent="0" marL="0">
-              <a:lnSpc>
-                <a:spcPts val="1680"/>
-              </a:lnSpc>
-              <a:spcBef>
-                <a:spcPts val="300"/>
-              </a:spcBef>
-              <a:spcAft>
-                <a:spcPts val="300"/>
-              </a:spcAft>
-              <a:buNone/>
-            </a:pPr>
-            <a:r>
-              <a:rPr lang="en-US" sz="1200" dirty="0">
+            <a:pPr algn="l" marL="342900" indent="-342900">
+              <a:lnSpc>
+                <a:spcPts val="1620"/>
+              </a:lnSpc>
+              <a:spcAft>
+                <a:spcPts val="300"/>
+              </a:spcAft>
+              <a:buSzPct val="100000"/>
+              <a:buChar char="•"/>
+            </a:pPr>
+            <a:r>
+              <a:rPr lang="en-US" sz="1200" b="1" dirty="0">
                 <a:solidFill>
                   <a:srgbClr val="1C2833"/>
                 </a:solidFill>
@@ -2656,7 +2583,71 @@
                 <a:ea typeface="Arial" pitchFamily="34" charset="-122"/>
                 <a:cs typeface="Arial" pitchFamily="34" charset="-120"/>
               </a:rPr>
-              <a:t>– Some pairs will get nervous leading the class — that's OK. Quiet leading is leading. – If the routine drifts off-time, gently signal but let them finish. – Mark quizzes within 48 hours.</a:t>
+              <a:t>Tier up:</a:t>
+            </a:r>
+            <a:pPr algn="l" indent="0" marL="0">
+              <a:lnSpc>
+                <a:spcPts val="1620"/>
+              </a:lnSpc>
+              <a:spcAft>
+                <a:spcPts val="300"/>
+              </a:spcAft>
+              <a:buNone/>
+            </a:pPr>
+            <a:r>
+              <a:rPr lang="en-US" sz="1200" dirty="0">
+                <a:solidFill>
+                  <a:srgbClr val="1C2833"/>
+                </a:solidFill>
+                <a:latin typeface="Arial" pitchFamily="34" charset="0"/>
+                <a:ea typeface="Arial" pitchFamily="34" charset="-122"/>
+                <a:cs typeface="Arial" pitchFamily="34" charset="-120"/>
+              </a:rPr>
+              <a:t> Students who finish quiz early write a 1-paragraph "what should change for Grade 11 students?" — input for Senior band.</a:t>
+            </a:r>
+            <a:endParaRPr lang="en-US" sz="1200" dirty="0"/>
+          </a:p>
+          <a:p>
+            <a:pPr algn="l" marL="342900" indent="-342900">
+              <a:lnSpc>
+                <a:spcPts val="1620"/>
+              </a:lnSpc>
+              <a:spcAft>
+                <a:spcPts val="300"/>
+              </a:spcAft>
+              <a:buSzPct val="100000"/>
+              <a:buChar char="•"/>
+            </a:pPr>
+            <a:r>
+              <a:rPr lang="en-US" sz="1200" b="1" dirty="0">
+                <a:solidFill>
+                  <a:srgbClr val="1C2833"/>
+                </a:solidFill>
+                <a:latin typeface="Arial" pitchFamily="34" charset="0"/>
+                <a:ea typeface="Arial" pitchFamily="34" charset="-122"/>
+                <a:cs typeface="Arial" pitchFamily="34" charset="-120"/>
+              </a:rPr>
+              <a:t>Tier down:</a:t>
+            </a:r>
+            <a:pPr algn="l" indent="0" marL="0">
+              <a:lnSpc>
+                <a:spcPts val="1620"/>
+              </a:lnSpc>
+              <a:spcAft>
+                <a:spcPts val="300"/>
+              </a:spcAft>
+              <a:buNone/>
+            </a:pPr>
+            <a:r>
+              <a:rPr lang="en-US" sz="1200" dirty="0">
+                <a:solidFill>
+                  <a:srgbClr val="1C2833"/>
+                </a:solidFill>
+                <a:latin typeface="Arial" pitchFamily="34" charset="0"/>
+                <a:ea typeface="Arial" pitchFamily="34" charset="-122"/>
+                <a:cs typeface="Arial" pitchFamily="34" charset="-120"/>
+              </a:rPr>
+              <a:t> Open-notebook quiz for students with documented learning needs.</a:t>
             </a:r>
             <a:endParaRPr lang="en-US" sz="1200" dirty="0"/>
           </a:p>
@@ -2814,7 +2805,7 @@
                 <a:ea typeface="Georgia" pitchFamily="34" charset="-122"/>
                 <a:cs typeface="Georgia" pitchFamily="34" charset="-120"/>
               </a:rPr>
-              <a:t>Citation(s) used in this lesson</a:t>
+              <a:t>Teacher notes</a:t>
             </a:r>
             <a:endParaRPr lang="en-US" sz="1800" dirty="0"/>
           </a:p>
@@ -2828,8 +2819,8 @@
         </p:nvSpPr>
         <p:spPr>
           <a:xfrm>
-            <a:off x="406301" y="870942"/>
-            <a:ext cx="8498026" cy="213271"/>
+            <a:off x="634901" y="883593"/>
+            <a:ext cx="8102798" cy="769441"/>
           </a:xfrm>
           <a:prstGeom prst="rect">
             <a:avLst/>
@@ -2841,17 +2832,15 @@
           <a:bodyPr wrap="square" lIns="0" tIns="0" rIns="0" bIns="0" rtlCol="0" anchor="t"/>
           <a:lstStyle/>
           <a:p>
-            <a:pPr algn="l" indent="0" marL="0">
-              <a:lnSpc>
-                <a:spcPts val="1680"/>
-              </a:lnSpc>
-              <a:spcBef>
-                <a:spcPts val="300"/>
-              </a:spcBef>
-              <a:spcAft>
-                <a:spcPts val="300"/>
-              </a:spcAft>
-              <a:buNone/>
+            <a:pPr algn="l" marL="342900" indent="-342900">
+              <a:lnSpc>
+                <a:spcPts val="1620"/>
+              </a:lnSpc>
+              <a:spcAft>
+                <a:spcPts val="300"/>
+              </a:spcAft>
+              <a:buSzPct val="100000"/>
+              <a:buChar char="•"/>
             </a:pPr>
             <a:r>
               <a:rPr lang="en-US" sz="1200" dirty="0">
@@ -2862,7 +2851,259 @@
                 <a:ea typeface="Arial" pitchFamily="34" charset="-122"/>
                 <a:cs typeface="Arial" pitchFamily="34" charset="-120"/>
               </a:rPr>
-              <a:t>– All cited sources verified.</a:t>
+              <a:t>Some pairs will get nervous leading the class — that's OK. Quiet leading is leading.</a:t>
+            </a:r>
+            <a:endParaRPr lang="en-US" sz="1200" dirty="0"/>
+          </a:p>
+          <a:p>
+            <a:pPr algn="l" marL="342900" indent="-342900">
+              <a:lnSpc>
+                <a:spcPts val="1620"/>
+              </a:lnSpc>
+              <a:spcAft>
+                <a:spcPts val="300"/>
+              </a:spcAft>
+              <a:buSzPct val="100000"/>
+              <a:buChar char="•"/>
+            </a:pPr>
+            <a:r>
+              <a:rPr lang="en-US" sz="1200" dirty="0">
+                <a:solidFill>
+                  <a:srgbClr val="1C2833"/>
+                </a:solidFill>
+                <a:latin typeface="Arial" pitchFamily="34" charset="0"/>
+                <a:ea typeface="Arial" pitchFamily="34" charset="-122"/>
+                <a:cs typeface="Arial" pitchFamily="34" charset="-120"/>
+              </a:rPr>
+              <a:t>If the routine drifts off-time, gently signal but let them finish.</a:t>
+            </a:r>
+            <a:endParaRPr lang="en-US" sz="1200" dirty="0"/>
+          </a:p>
+          <a:p>
+            <a:pPr algn="l" marL="342900" indent="-342900">
+              <a:lnSpc>
+                <a:spcPts val="1620"/>
+              </a:lnSpc>
+              <a:spcAft>
+                <a:spcPts val="300"/>
+              </a:spcAft>
+              <a:buSzPct val="100000"/>
+              <a:buChar char="•"/>
+            </a:pPr>
+            <a:r>
+              <a:rPr lang="en-US" sz="1200" dirty="0">
+                <a:solidFill>
+                  <a:srgbClr val="1C2833"/>
+                </a:solidFill>
+                <a:latin typeface="Arial" pitchFamily="34" charset="0"/>
+                <a:ea typeface="Arial" pitchFamily="34" charset="-122"/>
+                <a:cs typeface="Arial" pitchFamily="34" charset="-120"/>
+              </a:rPr>
+              <a:t>Mark quizzes within 48 hours.</a:t>
+            </a:r>
+            <a:endParaRPr lang="en-US" sz="1200" dirty="0"/>
+          </a:p>
+        </p:txBody>
+      </p:sp>
+      <p:sp>
+        <p:nvSpPr>
+          <p:cNvPr id="5" name="Text 3"/>
+          <p:cNvSpPr/>
+          <p:nvPr/>
+        </p:nvSpPr>
+        <p:spPr>
+          <a:xfrm>
+            <a:off x="406301" y="4434929"/>
+            <a:ext cx="8498026" cy="213271"/>
+          </a:xfrm>
+          <a:prstGeom prst="rect">
+            <a:avLst/>
+          </a:prstGeom>
+          <a:noFill/>
+          <a:ln/>
+        </p:spPr>
+        <p:txBody>
+          <a:bodyPr wrap="square" lIns="0" tIns="0" rIns="0" bIns="0" rtlCol="0" anchor="t"/>
+          <a:lstStyle/>
+          <a:p>
+            <a:pPr algn="l" indent="0" marL="0">
+              <a:lnSpc>
+                <a:spcPts val="1680"/>
+              </a:lnSpc>
+              <a:spcBef>
+                <a:spcPts val="300"/>
+              </a:spcBef>
+              <a:spcAft>
+                <a:spcPts val="300"/>
+              </a:spcAft>
+              <a:buNone/>
+            </a:pPr>
+            <a:r>
+              <a:rPr lang="en-US" sz="1200" dirty="0">
+                <a:solidFill>
+                  <a:srgbClr val="1C2833"/>
+                </a:solidFill>
+                <a:latin typeface="Arial" pitchFamily="34" charset="0"/>
+                <a:ea typeface="Arial" pitchFamily="34" charset="-122"/>
+                <a:cs typeface="Arial" pitchFamily="34" charset="-120"/>
+              </a:rPr>
+              <a:t>Middle ·  · IKS Curriculum</a:t>
+            </a:r>
+            <a:endParaRPr lang="en-US" sz="1200" dirty="0"/>
+          </a:p>
+        </p:txBody>
+      </p:sp>
+    </p:spTree>
+  </p:cSld>
+  <p:clrMapOvr>
+    <a:masterClrMapping/>
+  </p:clrMapOvr>
+</p:sld>
+</file>
+
+<file path=ppt/slides/slide13.xml><?xml version="1.0" encoding="utf-8"?>
+<p:sld xmlns:a="http://schemas.openxmlformats.org/drawingml/2006/main" xmlns:r="http://schemas.openxmlformats.org/officeDocument/2006/relationships" xmlns:p="http://schemas.openxmlformats.org/presentationml/2006/main">
+  <p:cSld name="Slide 13">
+    <p:bg>
+      <p:bgPr>
+        <a:solidFill>
+          <a:srgbClr val="FFFFFF"/>
+        </a:solidFill>
+      </p:bgPr>
+    </p:bg>
+    <p:spTree>
+      <p:nvGrpSpPr>
+        <p:cNvPr id="1" name=""/>
+        <p:cNvGrpSpPr/>
+        <p:nvPr/>
+      </p:nvGrpSpPr>
+      <p:grpSpPr>
+        <a:xfrm>
+          <a:off x="0" y="0"/>
+          <a:ext cx="0" cy="0"/>
+          <a:chOff x="0" y="0"/>
+          <a:chExt cx="0" cy="0"/>
+        </a:xfrm>
+      </p:grpSpPr>
+      <p:sp>
+        <p:nvSpPr>
+          <p:cNvPr id="2" name="Text 0"/>
+          <p:cNvSpPr/>
+          <p:nvPr/>
+        </p:nvSpPr>
+        <p:spPr>
+          <a:xfrm>
+            <a:off x="0" y="0"/>
+            <a:ext cx="9144000" cy="101501"/>
+          </a:xfrm>
+          <a:prstGeom prst="rect">
+            <a:avLst/>
+          </a:prstGeom>
+          <a:solidFill>
+            <a:srgbClr val="277884"/>
+          </a:solidFill>
+          <a:ln/>
+        </p:spPr>
+        <p:txBody>
+          <a:bodyPr wrap="square" rtlCol="0" anchor="ctr"/>
+          <a:lstStyle/>
+          <a:p>
+            <a:pPr indent="0" marL="0">
+              <a:buNone/>
+            </a:pPr>
+            <a:endParaRPr lang="en-US" dirty="0"/>
+          </a:p>
+        </p:txBody>
+      </p:sp>
+      <p:sp>
+        <p:nvSpPr>
+          <p:cNvPr id="3" name="Text 1"/>
+          <p:cNvSpPr/>
+          <p:nvPr/>
+        </p:nvSpPr>
+        <p:spPr>
+          <a:xfrm>
+            <a:off x="406301" y="457051"/>
+            <a:ext cx="8498026" cy="274290"/>
+          </a:xfrm>
+          <a:prstGeom prst="rect">
+            <a:avLst/>
+          </a:prstGeom>
+          <a:noFill/>
+          <a:ln/>
+        </p:spPr>
+        <p:txBody>
+          <a:bodyPr wrap="square" lIns="0" tIns="0" rIns="0" bIns="0" rtlCol="0" anchor="t"/>
+          <a:lstStyle/>
+          <a:p>
+            <a:pPr algn="l" indent="0" marL="0">
+              <a:lnSpc>
+                <a:spcPts val="2160"/>
+              </a:lnSpc>
+              <a:spcBef>
+                <a:spcPts val="600"/>
+              </a:spcBef>
+              <a:spcAft>
+                <a:spcPts val="800"/>
+              </a:spcAft>
+              <a:buNone/>
+            </a:pPr>
+            <a:r>
+              <a:rPr lang="en-US" sz="1800" b="1" dirty="0">
+                <a:solidFill>
+                  <a:srgbClr val="FE4447"/>
+                </a:solidFill>
+                <a:latin typeface="Georgia" pitchFamily="34" charset="0"/>
+                <a:ea typeface="Georgia" pitchFamily="34" charset="-122"/>
+                <a:cs typeface="Georgia" pitchFamily="34" charset="-120"/>
+              </a:rPr>
+              <a:t>Citation(s) used in this lesson</a:t>
+            </a:r>
+            <a:endParaRPr lang="en-US" sz="1800" dirty="0"/>
+          </a:p>
+        </p:txBody>
+      </p:sp>
+      <p:sp>
+        <p:nvSpPr>
+          <p:cNvPr id="4" name="Text 2"/>
+          <p:cNvSpPr/>
+          <p:nvPr/>
+        </p:nvSpPr>
+        <p:spPr>
+          <a:xfrm>
+            <a:off x="634901" y="883593"/>
+            <a:ext cx="8102798" cy="281880"/>
+          </a:xfrm>
+          <a:prstGeom prst="rect">
+            <a:avLst/>
+          </a:prstGeom>
+          <a:noFill/>
+          <a:ln/>
+        </p:spPr>
+        <p:txBody>
+          <a:bodyPr wrap="square" lIns="0" tIns="0" rIns="0" bIns="0" rtlCol="0" anchor="t"/>
+          <a:lstStyle/>
+          <a:p>
+            <a:pPr algn="l" marL="342900" indent="-342900">
+              <a:lnSpc>
+                <a:spcPts val="1620"/>
+              </a:lnSpc>
+              <a:spcAft>
+                <a:spcPts val="300"/>
+              </a:spcAft>
+              <a:buSzPct val="100000"/>
+              <a:buChar char="•"/>
+            </a:pPr>
+            <a:r>
+              <a:rPr lang="en-US" sz="1200" dirty="0">
+                <a:solidFill>
+                  <a:srgbClr val="1C2833"/>
+                </a:solidFill>
+                <a:latin typeface="Arial" pitchFamily="34" charset="0"/>
+                <a:ea typeface="Arial" pitchFamily="34" charset="-122"/>
+                <a:cs typeface="Arial" pitchFamily="34" charset="-120"/>
+              </a:rPr>
+              <a:t>All cited sources verified.</a:t>
             </a:r>
             <a:endParaRPr lang="en-US" sz="1200" dirty="0"/>
           </a:p>
@@ -3020,7 +3261,7 @@
                 <a:ea typeface="Georgia" pitchFamily="34" charset="-122"/>
                 <a:cs typeface="Georgia" pitchFamily="34" charset="-120"/>
               </a:rPr>
-              <a:t>Materials</a:t>
+              <a:t>Learning objective</a:t>
             </a:r>
             <a:endParaRPr lang="en-US" sz="1800" dirty="0"/>
           </a:p>
@@ -3035,7 +3276,7 @@
         <p:spPr>
           <a:xfrm>
             <a:off x="406301" y="870942"/>
-            <a:ext cx="8498026" cy="436066"/>
+            <a:ext cx="8498026" cy="426541"/>
           </a:xfrm>
           <a:prstGeom prst="rect">
             <a:avLst/>
@@ -3068,53 +3309,7 @@
                 <a:ea typeface="Arial" pitchFamily="34" charset="-122"/>
                 <a:cs typeface="Arial" pitchFamily="34" charset="-120"/>
               </a:rPr>
-              <a:t>– Summative quiz (</a:t>
-            </a:r>
-            <a:pPr algn="l" indent="0" marL="0">
-              <a:lnSpc>
-                <a:spcPts val="1680"/>
-              </a:lnSpc>
-              <a:spcBef>
-                <a:spcPts val="300"/>
-              </a:spcBef>
-              <a:spcAft>
-                <a:spcPts val="300"/>
-              </a:spcAft>
-              <a:buNone/>
-            </a:pPr>
-            <a:r>
-              <a:rPr lang="en-US" sz="1200" dirty="0">
-                <a:solidFill>
-                  <a:srgbClr val="1C2833"/>
-                </a:solidFill>
-                <a:latin typeface="Arial" pitchFamily="34" charset="0"/>
-                <a:ea typeface="Arial" pitchFamily="34" charset="-122"/>
-                <a:cs typeface="Arial" pitchFamily="34" charset="-120"/>
-              </a:rPr>
-              <a:t>quizzes/summative.md</a:t>
-            </a:r>
-            <a:pPr algn="l" indent="0" marL="0">
-              <a:lnSpc>
-                <a:spcPts val="1680"/>
-              </a:lnSpc>
-              <a:spcBef>
-                <a:spcPts val="300"/>
-              </a:spcBef>
-              <a:spcAft>
-                <a:spcPts val="300"/>
-              </a:spcAft>
-              <a:buNone/>
-            </a:pPr>
-            <a:r>
-              <a:rPr lang="en-US" sz="1200" dirty="0">
-                <a:solidFill>
-                  <a:srgbClr val="1C2833"/>
-                </a:solidFill>
-                <a:latin typeface="Arial" pitchFamily="34" charset="0"/>
-                <a:ea typeface="Arial" pitchFamily="34" charset="-122"/>
-                <a:cs typeface="Arial" pitchFamily="34" charset="-120"/>
-              </a:rPr>
-              <a:t>). – Mats for everyone (audience does the routine alongside the presenters). – Stopwatch. – Rubric per pair.</a:t>
+              <a:t>By the end of this lesson, students will demonstrate mastery via a summative quiz and a 5-minute routine they lead the class through.</a:t>
             </a:r>
             <a:endParaRPr lang="en-US" sz="1200" dirty="0"/>
           </a:p>
@@ -3272,7 +3467,7 @@
                 <a:ea typeface="Georgia" pitchFamily="34" charset="-122"/>
                 <a:cs typeface="Georgia" pitchFamily="34" charset="-120"/>
               </a:rPr>
-              <a:t>Lesson flow</a:t>
+              <a:t>Materials</a:t>
             </a:r>
             <a:endParaRPr lang="en-US" sz="1800" dirty="0"/>
           </a:p>
@@ -3281,6 +3476,164 @@
       <p:sp>
         <p:nvSpPr>
           <p:cNvPr id="4" name="Text 2"/>
+          <p:cNvSpPr/>
+          <p:nvPr/>
+        </p:nvSpPr>
+        <p:spPr>
+          <a:xfrm>
+            <a:off x="634901" y="883593"/>
+            <a:ext cx="8102798" cy="1032272"/>
+          </a:xfrm>
+          <a:prstGeom prst="rect">
+            <a:avLst/>
+          </a:prstGeom>
+          <a:noFill/>
+          <a:ln/>
+        </p:spPr>
+        <p:txBody>
+          <a:bodyPr wrap="square" lIns="0" tIns="0" rIns="0" bIns="0" rtlCol="0" anchor="t"/>
+          <a:lstStyle/>
+          <a:p>
+            <a:pPr algn="l" marL="342900" indent="-342900">
+              <a:lnSpc>
+                <a:spcPts val="1620"/>
+              </a:lnSpc>
+              <a:spcAft>
+                <a:spcPts val="300"/>
+              </a:spcAft>
+              <a:buSzPct val="100000"/>
+              <a:buChar char="•"/>
+            </a:pPr>
+            <a:r>
+              <a:rPr lang="en-US" sz="1200" dirty="0">
+                <a:solidFill>
+                  <a:srgbClr val="1C2833"/>
+                </a:solidFill>
+                <a:latin typeface="Arial" pitchFamily="34" charset="0"/>
+                <a:ea typeface="Arial" pitchFamily="34" charset="-122"/>
+                <a:cs typeface="Arial" pitchFamily="34" charset="-120"/>
+              </a:rPr>
+              <a:t>Summative quiz (</a:t>
+            </a:r>
+            <a:pPr algn="l" indent="0" marL="0">
+              <a:lnSpc>
+                <a:spcPts val="1620"/>
+              </a:lnSpc>
+              <a:spcAft>
+                <a:spcPts val="300"/>
+              </a:spcAft>
+              <a:buNone/>
+            </a:pPr>
+            <a:r>
+              <a:rPr lang="en-US" sz="1200" dirty="0">
+                <a:solidFill>
+                  <a:srgbClr val="1C2833"/>
+                </a:solidFill>
+                <a:latin typeface="Arial" pitchFamily="34" charset="0"/>
+                <a:ea typeface="Arial" pitchFamily="34" charset="-122"/>
+                <a:cs typeface="Arial" pitchFamily="34" charset="-120"/>
+              </a:rPr>
+              <a:t>quizzes/summative.md</a:t>
+            </a:r>
+            <a:pPr algn="l" indent="0" marL="0">
+              <a:lnSpc>
+                <a:spcPts val="1620"/>
+              </a:lnSpc>
+              <a:spcAft>
+                <a:spcPts val="300"/>
+              </a:spcAft>
+              <a:buNone/>
+            </a:pPr>
+            <a:r>
+              <a:rPr lang="en-US" sz="1200" dirty="0">
+                <a:solidFill>
+                  <a:srgbClr val="1C2833"/>
+                </a:solidFill>
+                <a:latin typeface="Arial" pitchFamily="34" charset="0"/>
+                <a:ea typeface="Arial" pitchFamily="34" charset="-122"/>
+                <a:cs typeface="Arial" pitchFamily="34" charset="-120"/>
+              </a:rPr>
+              <a:t>).</a:t>
+            </a:r>
+            <a:endParaRPr lang="en-US" sz="1200" dirty="0"/>
+          </a:p>
+          <a:p>
+            <a:pPr algn="l" marL="342900" indent="-342900">
+              <a:lnSpc>
+                <a:spcPts val="1620"/>
+              </a:lnSpc>
+              <a:spcAft>
+                <a:spcPts val="300"/>
+              </a:spcAft>
+              <a:buSzPct val="100000"/>
+              <a:buChar char="•"/>
+            </a:pPr>
+            <a:r>
+              <a:rPr lang="en-US" sz="1200" dirty="0">
+                <a:solidFill>
+                  <a:srgbClr val="1C2833"/>
+                </a:solidFill>
+                <a:latin typeface="Arial" pitchFamily="34" charset="0"/>
+                <a:ea typeface="Arial" pitchFamily="34" charset="-122"/>
+                <a:cs typeface="Arial" pitchFamily="34" charset="-120"/>
+              </a:rPr>
+              <a:t>Mats for everyone (audience does the routine alongside the presenters).</a:t>
+            </a:r>
+            <a:endParaRPr lang="en-US" sz="1200" dirty="0"/>
+          </a:p>
+          <a:p>
+            <a:pPr algn="l" marL="342900" indent="-342900">
+              <a:lnSpc>
+                <a:spcPts val="1620"/>
+              </a:lnSpc>
+              <a:spcAft>
+                <a:spcPts val="300"/>
+              </a:spcAft>
+              <a:buSzPct val="100000"/>
+              <a:buChar char="•"/>
+            </a:pPr>
+            <a:r>
+              <a:rPr lang="en-US" sz="1200" dirty="0">
+                <a:solidFill>
+                  <a:srgbClr val="1C2833"/>
+                </a:solidFill>
+                <a:latin typeface="Arial" pitchFamily="34" charset="0"/>
+                <a:ea typeface="Arial" pitchFamily="34" charset="-122"/>
+                <a:cs typeface="Arial" pitchFamily="34" charset="-120"/>
+              </a:rPr>
+              <a:t>Stopwatch.</a:t>
+            </a:r>
+            <a:endParaRPr lang="en-US" sz="1200" dirty="0"/>
+          </a:p>
+          <a:p>
+            <a:pPr algn="l" marL="342900" indent="-342900">
+              <a:lnSpc>
+                <a:spcPts val="1620"/>
+              </a:lnSpc>
+              <a:spcAft>
+                <a:spcPts val="300"/>
+              </a:spcAft>
+              <a:buSzPct val="100000"/>
+              <a:buChar char="•"/>
+            </a:pPr>
+            <a:r>
+              <a:rPr lang="en-US" sz="1200" dirty="0">
+                <a:solidFill>
+                  <a:srgbClr val="1C2833"/>
+                </a:solidFill>
+                <a:latin typeface="Arial" pitchFamily="34" charset="0"/>
+                <a:ea typeface="Arial" pitchFamily="34" charset="-122"/>
+                <a:cs typeface="Arial" pitchFamily="34" charset="-120"/>
+              </a:rPr>
+              <a:t>Rubric per pair.</a:t>
+            </a:r>
+            <a:endParaRPr lang="en-US" sz="1200" dirty="0"/>
+          </a:p>
+        </p:txBody>
+      </p:sp>
+      <p:sp>
+        <p:nvSpPr>
+          <p:cNvPr id="5" name="Text 3"/>
           <p:cNvSpPr/>
           <p:nvPr/>
         </p:nvSpPr>
@@ -3430,7 +3783,7 @@
                 <a:ea typeface="Georgia" pitchFamily="34" charset="-122"/>
                 <a:cs typeface="Georgia" pitchFamily="34" charset="-120"/>
               </a:rPr>
-              <a:t>Settle (2 min)</a:t>
+              <a:t>Lesson flow</a:t>
             </a:r>
             <a:endParaRPr lang="en-US" sz="1800" dirty="0"/>
           </a:p>
@@ -3439,54 +3792,6 @@
       <p:sp>
         <p:nvSpPr>
           <p:cNvPr id="4" name="Text 2"/>
-          <p:cNvSpPr/>
-          <p:nvPr/>
-        </p:nvSpPr>
-        <p:spPr>
-          <a:xfrm>
-            <a:off x="406301" y="870942"/>
-            <a:ext cx="8498026" cy="213271"/>
-          </a:xfrm>
-          <a:prstGeom prst="rect">
-            <a:avLst/>
-          </a:prstGeom>
-          <a:noFill/>
-          <a:ln/>
-        </p:spPr>
-        <p:txBody>
-          <a:bodyPr wrap="square" lIns="0" tIns="0" rIns="0" bIns="0" rtlCol="0" anchor="t"/>
-          <a:lstStyle/>
-          <a:p>
-            <a:pPr algn="l" indent="0" marL="0">
-              <a:lnSpc>
-                <a:spcPts val="1680"/>
-              </a:lnSpc>
-              <a:spcBef>
-                <a:spcPts val="300"/>
-              </a:spcBef>
-              <a:spcAft>
-                <a:spcPts val="300"/>
-              </a:spcAft>
-              <a:buNone/>
-            </a:pPr>
-            <a:r>
-              <a:rPr lang="en-US" sz="1200" dirty="0">
-                <a:solidFill>
-                  <a:srgbClr val="1C2833"/>
-                </a:solidFill>
-                <a:latin typeface="Arial" pitchFamily="34" charset="0"/>
-                <a:ea typeface="Arial" pitchFamily="34" charset="-122"/>
-                <a:cs typeface="Arial" pitchFamily="34" charset="-120"/>
-              </a:rPr>
-              <a:t>– Sukhāsana. 5 breaths.</a:t>
-            </a:r>
-            <a:endParaRPr lang="en-US" sz="1200" dirty="0"/>
-          </a:p>
-        </p:txBody>
-      </p:sp>
-      <p:sp>
-        <p:nvSpPr>
-          <p:cNvPr id="5" name="Text 3"/>
           <p:cNvSpPr/>
           <p:nvPr/>
         </p:nvSpPr>
@@ -3636,7 +3941,7 @@
                 <a:ea typeface="Georgia" pitchFamily="34" charset="-122"/>
                 <a:cs typeface="Georgia" pitchFamily="34" charset="-120"/>
               </a:rPr>
-              <a:t>Part 1: Summative Quiz (20 min)</a:t>
+              <a:t>Settle (2 min)</a:t>
             </a:r>
             <a:endParaRPr lang="en-US" sz="1800" dirty="0"/>
           </a:p>
@@ -3650,8 +3955,8 @@
         </p:nvSpPr>
         <p:spPr>
           <a:xfrm>
-            <a:off x="406301" y="870942"/>
-            <a:ext cx="8498026" cy="426541"/>
+            <a:off x="634901" y="883593"/>
+            <a:ext cx="8102798" cy="281880"/>
           </a:xfrm>
           <a:prstGeom prst="rect">
             <a:avLst/>
@@ -3663,17 +3968,15 @@
           <a:bodyPr wrap="square" lIns="0" tIns="0" rIns="0" bIns="0" rtlCol="0" anchor="t"/>
           <a:lstStyle/>
           <a:p>
-            <a:pPr algn="l" indent="0" marL="0">
-              <a:lnSpc>
-                <a:spcPts val="1680"/>
-              </a:lnSpc>
-              <a:spcBef>
-                <a:spcPts val="300"/>
-              </a:spcBef>
-              <a:spcAft>
-                <a:spcPts val="300"/>
-              </a:spcAft>
-              <a:buNone/>
+            <a:pPr algn="l" marL="342900" indent="-342900">
+              <a:lnSpc>
+                <a:spcPts val="1620"/>
+              </a:lnSpc>
+              <a:spcAft>
+                <a:spcPts val="300"/>
+              </a:spcAft>
+              <a:buSzPct val="100000"/>
+              <a:buChar char="•"/>
             </a:pPr>
             <a:r>
               <a:rPr lang="en-US" sz="1200" dirty="0">
@@ -3684,7 +3987,7 @@
                 <a:ea typeface="Arial" pitchFamily="34" charset="-122"/>
                 <a:cs typeface="Arial" pitchFamily="34" charset="-120"/>
               </a:rPr>
-              <a:t>– Distribute. Closed notebook. – 25 marks: limb identification, āsana naming, breath co-ordination match, prāṇāyāma definition + one safety question, short answer on physiology, open response.</a:t>
+              <a:t>Sukhāsana. 5 breaths.</a:t>
             </a:r>
             <a:endParaRPr lang="en-US" sz="1200" dirty="0"/>
           </a:p>
@@ -3842,7 +4145,7 @@
                 <a:ea typeface="Georgia" pitchFamily="34" charset="-122"/>
                 <a:cs typeface="Georgia" pitchFamily="34" charset="-120"/>
               </a:rPr>
-              <a:t>Part 2: Routine Showcase (35 min)</a:t>
+              <a:t>Part 1: Summative Quiz (20 min)</a:t>
             </a:r>
             <a:endParaRPr lang="en-US" sz="1800" dirty="0"/>
           </a:p>
@@ -3856,8 +4159,8 @@
         </p:nvSpPr>
         <p:spPr>
           <a:xfrm>
-            <a:off x="406301" y="870942"/>
-            <a:ext cx="8498026" cy="426541"/>
+            <a:off x="634901" y="883593"/>
+            <a:ext cx="8102798" cy="731341"/>
           </a:xfrm>
           <a:prstGeom prst="rect">
             <a:avLst/>
@@ -3869,17 +4172,15 @@
           <a:bodyPr wrap="square" lIns="0" tIns="0" rIns="0" bIns="0" rtlCol="0" anchor="t"/>
           <a:lstStyle/>
           <a:p>
-            <a:pPr algn="l" indent="0" marL="0">
-              <a:lnSpc>
-                <a:spcPts val="1680"/>
-              </a:lnSpc>
-              <a:spcBef>
-                <a:spcPts val="300"/>
-              </a:spcBef>
-              <a:spcAft>
-                <a:spcPts val="300"/>
-              </a:spcAft>
-              <a:buNone/>
+            <a:pPr algn="l" marL="342900" indent="-342900">
+              <a:lnSpc>
+                <a:spcPts val="1620"/>
+              </a:lnSpc>
+              <a:spcAft>
+                <a:spcPts val="300"/>
+              </a:spcAft>
+              <a:buSzPct val="100000"/>
+              <a:buChar char="•"/>
             </a:pPr>
             <a:r>
               <a:rPr lang="en-US" sz="1200" dirty="0">
@@ -3890,32 +4191,10 @@
                 <a:ea typeface="Arial" pitchFamily="34" charset="-122"/>
                 <a:cs typeface="Arial" pitchFamily="34" charset="-120"/>
               </a:rPr>
-              <a:t>– Each pair leads a 5-minute routine. – AUDIENCE PARTICIPATES — does the routine on their own mat as the pair leads. – 7 minutes per pair (5 routine + 2 rubric mark + brief Q&amp;A).</a:t>
+              <a:t>Distribute. Closed notebook.</a:t>
             </a:r>
             <a:endParaRPr lang="en-US" sz="1200" dirty="0"/>
           </a:p>
-        </p:txBody>
-      </p:sp>
-      <p:sp>
-        <p:nvSpPr>
-          <p:cNvPr id="5" name="Text 3"/>
-          <p:cNvSpPr/>
-          <p:nvPr/>
-        </p:nvSpPr>
-        <p:spPr>
-          <a:xfrm>
-            <a:off x="634901" y="1386334"/>
-            <a:ext cx="8102798" cy="281880"/>
-          </a:xfrm>
-          <a:prstGeom prst="rect">
-            <a:avLst/>
-          </a:prstGeom>
-          <a:noFill/>
-          <a:ln/>
-        </p:spPr>
-        <p:txBody>
-          <a:bodyPr wrap="square" lIns="0" tIns="0" rIns="0" bIns="0" rtlCol="0" anchor="t"/>
-          <a:lstStyle/>
           <a:p>
             <a:pPr algn="l" marL="342900" indent="-342900">
               <a:lnSpc>
@@ -3936,27 +4215,7 @@
                 <a:ea typeface="Arial" pitchFamily="34" charset="-122"/>
                 <a:cs typeface="Arial" pitchFamily="34" charset="-120"/>
               </a:rPr>
-              <a:t>~5 pairs fit in 35 min. </a:t>
-            </a:r>
-            <a:pPr algn="l" indent="0" marL="0">
-              <a:lnSpc>
-                <a:spcPts val="1620"/>
-              </a:lnSpc>
-              <a:spcAft>
-                <a:spcPts val="300"/>
-              </a:spcAft>
-              <a:buNone/>
-            </a:pPr>
-            <a:r>
-              <a:rPr lang="en-US" sz="1200" b="1" dirty="0">
-                <a:solidFill>
-                  <a:srgbClr val="1C2833"/>
-                </a:solidFill>
-                <a:latin typeface="Arial" pitchFamily="34" charset="0"/>
-                <a:ea typeface="Arial" pitchFamily="34" charset="-122"/>
-                <a:cs typeface="Arial" pitchFamily="34" charset="-120"/>
-              </a:rPr>
-              <a:t>Book next day for remaining pairs.</a:t>
+              <a:t>25 marks: limb identification, āsana naming, breath co-ordination match, prāṇāyāma definition + one safety question, short answer on physiology, open response.</a:t>
             </a:r>
             <a:endParaRPr lang="en-US" sz="1200" dirty="0"/>
           </a:p>
@@ -3964,55 +4223,7 @@
       </p:sp>
       <p:sp>
         <p:nvSpPr>
-          <p:cNvPr id="6" name="Text 4"/>
-          <p:cNvSpPr/>
-          <p:nvPr/>
-        </p:nvSpPr>
-        <p:spPr>
-          <a:xfrm>
-            <a:off x="406301" y="1757065"/>
-            <a:ext cx="8498026" cy="213271"/>
-          </a:xfrm>
-          <a:prstGeom prst="rect">
-            <a:avLst/>
-          </a:prstGeom>
-          <a:noFill/>
-          <a:ln/>
-        </p:spPr>
-        <p:txBody>
-          <a:bodyPr wrap="square" lIns="0" tIns="0" rIns="0" bIns="0" rtlCol="0" anchor="t"/>
-          <a:lstStyle/>
-          <a:p>
-            <a:pPr algn="l" indent="0" marL="0">
-              <a:lnSpc>
-                <a:spcPts val="1680"/>
-              </a:lnSpc>
-              <a:spcBef>
-                <a:spcPts val="300"/>
-              </a:spcBef>
-              <a:spcAft>
-                <a:spcPts val="300"/>
-              </a:spcAft>
-              <a:buNone/>
-            </a:pPr>
-            <a:r>
-              <a:rPr lang="en-US" sz="1200" dirty="0">
-                <a:solidFill>
-                  <a:srgbClr val="1C2833"/>
-                </a:solidFill>
-                <a:latin typeface="Arial" pitchFamily="34" charset="0"/>
-                <a:ea typeface="Arial" pitchFamily="34" charset="-122"/>
-                <a:cs typeface="Arial" pitchFamily="34" charset="-120"/>
-              </a:rPr>
-              <a:t>– Teacher marks rubric in real-time.</a:t>
-            </a:r>
-            <a:endParaRPr lang="en-US" sz="1200" dirty="0"/>
-          </a:p>
-        </p:txBody>
-      </p:sp>
-      <p:sp>
-        <p:nvSpPr>
-          <p:cNvPr id="7" name="Text 5"/>
+          <p:cNvPr id="5" name="Text 3"/>
           <p:cNvSpPr/>
           <p:nvPr/>
         </p:nvSpPr>
@@ -4162,7 +4373,7 @@
                 <a:ea typeface="Georgia" pitchFamily="34" charset="-122"/>
                 <a:cs typeface="Georgia" pitchFamily="34" charset="-120"/>
               </a:rPr>
-              <a:t>Wrap-up (3 min)</a:t>
+              <a:t>Part 2: Routine Showcase (35 min)</a:t>
             </a:r>
             <a:endParaRPr lang="en-US" sz="1800" dirty="0"/>
           </a:p>
@@ -4176,8 +4387,8 @@
         </p:nvSpPr>
         <p:spPr>
           <a:xfrm>
-            <a:off x="406301" y="870942"/>
-            <a:ext cx="8498026" cy="213271"/>
+            <a:off x="634901" y="883593"/>
+            <a:ext cx="8102798" cy="1257002"/>
           </a:xfrm>
           <a:prstGeom prst="rect">
             <a:avLst/>
@@ -4189,17 +4400,15 @@
           <a:bodyPr wrap="square" lIns="0" tIns="0" rIns="0" bIns="0" rtlCol="0" anchor="t"/>
           <a:lstStyle/>
           <a:p>
-            <a:pPr algn="l" indent="0" marL="0">
-              <a:lnSpc>
-                <a:spcPts val="1680"/>
-              </a:lnSpc>
-              <a:spcBef>
-                <a:spcPts val="300"/>
-              </a:spcBef>
-              <a:spcAft>
-                <a:spcPts val="300"/>
-              </a:spcAft>
-              <a:buNone/>
+            <a:pPr algn="l" marL="342900" indent="-342900">
+              <a:lnSpc>
+                <a:spcPts val="1620"/>
+              </a:lnSpc>
+              <a:spcAft>
+                <a:spcPts val="300"/>
+              </a:spcAft>
+              <a:buSzPct val="100000"/>
+              <a:buChar char="•"/>
             </a:pPr>
             <a:r>
               <a:rPr lang="en-US" sz="1200" dirty="0">
@@ -4210,7 +4419,123 @@
                 <a:ea typeface="Arial" pitchFamily="34" charset="-122"/>
                 <a:cs typeface="Arial" pitchFamily="34" charset="-120"/>
               </a:rPr>
-              <a:t>– Closing namaste in tāḍāsana. – Reflection slip submitted.</a:t>
+              <a:t>Each pair leads a 5-minute routine.</a:t>
+            </a:r>
+            <a:endParaRPr lang="en-US" sz="1200" dirty="0"/>
+          </a:p>
+          <a:p>
+            <a:pPr algn="l" marL="342900" indent="-342900">
+              <a:lnSpc>
+                <a:spcPts val="1620"/>
+              </a:lnSpc>
+              <a:spcAft>
+                <a:spcPts val="300"/>
+              </a:spcAft>
+              <a:buSzPct val="100000"/>
+              <a:buChar char="•"/>
+            </a:pPr>
+            <a:r>
+              <a:rPr lang="en-US" sz="1200" dirty="0">
+                <a:solidFill>
+                  <a:srgbClr val="1C2833"/>
+                </a:solidFill>
+                <a:latin typeface="Arial" pitchFamily="34" charset="0"/>
+                <a:ea typeface="Arial" pitchFamily="34" charset="-122"/>
+                <a:cs typeface="Arial" pitchFamily="34" charset="-120"/>
+              </a:rPr>
+              <a:t>AUDIENCE PARTICIPATES — does the routine on their own mat as the pair leads.</a:t>
+            </a:r>
+            <a:endParaRPr lang="en-US" sz="1200" dirty="0"/>
+          </a:p>
+          <a:p>
+            <a:pPr algn="l" marL="342900" indent="-342900">
+              <a:lnSpc>
+                <a:spcPts val="1620"/>
+              </a:lnSpc>
+              <a:spcAft>
+                <a:spcPts val="300"/>
+              </a:spcAft>
+              <a:buSzPct val="100000"/>
+              <a:buChar char="•"/>
+            </a:pPr>
+            <a:r>
+              <a:rPr lang="en-US" sz="1200" dirty="0">
+                <a:solidFill>
+                  <a:srgbClr val="1C2833"/>
+                </a:solidFill>
+                <a:latin typeface="Arial" pitchFamily="34" charset="0"/>
+                <a:ea typeface="Arial" pitchFamily="34" charset="-122"/>
+                <a:cs typeface="Arial" pitchFamily="34" charset="-120"/>
+              </a:rPr>
+              <a:t>7 minutes per pair (5 routine + 2 rubric mark + brief Q&amp;A).</a:t>
+            </a:r>
+            <a:endParaRPr lang="en-US" sz="1200" dirty="0"/>
+          </a:p>
+          <a:p>
+            <a:pPr algn="l" marL="342900" indent="-342900">
+              <a:lnSpc>
+                <a:spcPts val="1620"/>
+              </a:lnSpc>
+              <a:spcAft>
+                <a:spcPts val="300"/>
+              </a:spcAft>
+              <a:buSzPct val="100000"/>
+              <a:buChar char="•"/>
+            </a:pPr>
+            <a:r>
+              <a:rPr lang="en-US" sz="1200" dirty="0">
+                <a:solidFill>
+                  <a:srgbClr val="1C2833"/>
+                </a:solidFill>
+                <a:latin typeface="Arial" pitchFamily="34" charset="0"/>
+                <a:ea typeface="Arial" pitchFamily="34" charset="-122"/>
+                <a:cs typeface="Arial" pitchFamily="34" charset="-120"/>
+              </a:rPr>
+              <a:t>~5 pairs fit in 35 min. </a:t>
+            </a:r>
+            <a:pPr algn="l" indent="0" marL="0">
+              <a:lnSpc>
+                <a:spcPts val="1620"/>
+              </a:lnSpc>
+              <a:spcAft>
+                <a:spcPts val="300"/>
+              </a:spcAft>
+              <a:buNone/>
+            </a:pPr>
+            <a:r>
+              <a:rPr lang="en-US" sz="1200" b="1" dirty="0">
+                <a:solidFill>
+                  <a:srgbClr val="1C2833"/>
+                </a:solidFill>
+                <a:latin typeface="Arial" pitchFamily="34" charset="0"/>
+                <a:ea typeface="Arial" pitchFamily="34" charset="-122"/>
+                <a:cs typeface="Arial" pitchFamily="34" charset="-120"/>
+              </a:rPr>
+              <a:t>Book next day for remaining pairs.</a:t>
+            </a:r>
+            <a:endParaRPr lang="en-US" sz="1200" dirty="0"/>
+          </a:p>
+          <a:p>
+            <a:pPr algn="l" marL="342900" indent="-342900">
+              <a:lnSpc>
+                <a:spcPts val="1620"/>
+              </a:lnSpc>
+              <a:spcAft>
+                <a:spcPts val="300"/>
+              </a:spcAft>
+              <a:buSzPct val="100000"/>
+              <a:buChar char="•"/>
+            </a:pPr>
+            <a:r>
+              <a:rPr lang="en-US" sz="1200" dirty="0">
+                <a:solidFill>
+                  <a:srgbClr val="1C2833"/>
+                </a:solidFill>
+                <a:latin typeface="Arial" pitchFamily="34" charset="0"/>
+                <a:ea typeface="Arial" pitchFamily="34" charset="-122"/>
+                <a:cs typeface="Arial" pitchFamily="34" charset="-120"/>
+              </a:rPr>
+              <a:t>Teacher marks rubric in real-time.</a:t>
             </a:r>
             <a:endParaRPr lang="en-US" sz="1200" dirty="0"/>
           </a:p>
@@ -4368,7 +4693,7 @@
                 <a:ea typeface="Georgia" pitchFamily="34" charset="-122"/>
                 <a:cs typeface="Georgia" pitchFamily="34" charset="-120"/>
               </a:rPr>
-              <a:t>Student-facing content</a:t>
+              <a:t>Wrap-up (3 min)</a:t>
             </a:r>
             <a:endParaRPr lang="en-US" sz="1800" dirty="0"/>
           </a:p>
@@ -4382,269 +4707,71 @@
         </p:nvSpPr>
         <p:spPr>
           <a:xfrm>
-            <a:off x="406301" y="883593"/>
-            <a:ext cx="8331398" cy="1881187"/>
-          </a:xfrm>
-          <a:prstGeom prst="rect">
-            <a:avLst/>
-          </a:prstGeom>
-          <a:solidFill>
-            <a:srgbClr val="F4F8F9"/>
-          </a:solidFill>
-          <a:ln/>
-        </p:spPr>
-        <p:txBody>
-          <a:bodyPr wrap="square" rtlCol="0" anchor="ctr"/>
-          <a:lstStyle/>
-          <a:p>
-            <a:pPr indent="0" marL="0">
-              <a:buNone/>
-            </a:pPr>
-            <a:endParaRPr lang="en-US" dirty="0"/>
-          </a:p>
-        </p:txBody>
-      </p:sp>
-      <p:sp>
-        <p:nvSpPr>
-          <p:cNvPr id="5" name="Shape 3"/>
-          <p:cNvSpPr/>
-          <p:nvPr/>
-        </p:nvSpPr>
-        <p:spPr>
-          <a:xfrm>
-            <a:off x="434876" y="883593"/>
-            <a:ext cx="0" cy="1881187"/>
-          </a:xfrm>
-          <a:prstGeom prst="line">
+            <a:off x="634901" y="883593"/>
+            <a:ext cx="8102798" cy="525661"/>
+          </a:xfrm>
+          <a:prstGeom prst="rect">
             <a:avLst/>
           </a:prstGeom>
           <a:noFill/>
-          <a:ln w="57150">
-            <a:solidFill>
-              <a:srgbClr val="FE4447"/>
-            </a:solidFill>
-            <a:prstDash val="solid"/>
-          </a:ln>
-        </p:spPr>
-      </p:sp>
-      <p:sp>
-        <p:nvSpPr>
-          <p:cNvPr id="6" name="Text 4"/>
-          <p:cNvSpPr/>
-          <p:nvPr/>
-        </p:nvSpPr>
-        <p:spPr>
-          <a:xfrm>
-            <a:off x="692051" y="1074093"/>
-            <a:ext cx="7973389" cy="230981"/>
-          </a:xfrm>
-          <a:prstGeom prst="rect">
-            <a:avLst/>
-          </a:prstGeom>
-          <a:noFill/>
           <a:ln/>
         </p:spPr>
         <p:txBody>
           <a:bodyPr wrap="square" lIns="0" tIns="0" rIns="0" bIns="0" rtlCol="0" anchor="t"/>
           <a:lstStyle/>
           <a:p>
-            <a:pPr algn="l" indent="0" marL="0">
-              <a:lnSpc>
-                <a:spcPts val="1820"/>
-              </a:lnSpc>
-              <a:spcBef>
-                <a:spcPts val="300"/>
-              </a:spcBef>
-              <a:spcAft>
-                <a:spcPts val="300"/>
-              </a:spcAft>
-              <a:buNone/>
-            </a:pPr>
-            <a:r>
-              <a:rPr lang="en-US" sz="1300" b="1" i="1" dirty="0">
+            <a:pPr algn="l" marL="342900" indent="-342900">
+              <a:lnSpc>
+                <a:spcPts val="1620"/>
+              </a:lnSpc>
+              <a:spcAft>
+                <a:spcPts val="300"/>
+              </a:spcAft>
+              <a:buSzPct val="100000"/>
+              <a:buChar char="•"/>
+            </a:pPr>
+            <a:r>
+              <a:rPr lang="en-US" sz="1200" dirty="0">
                 <a:solidFill>
                   <a:srgbClr val="1C2833"/>
                 </a:solidFill>
-                <a:latin typeface="Georgia" pitchFamily="34" charset="0"/>
-                <a:ea typeface="Georgia" pitchFamily="34" charset="-122"/>
-                <a:cs typeface="Georgia" pitchFamily="34" charset="-120"/>
-              </a:rPr>
-              <a:t>Day 10: quiz + routine showcase</a:t>
-            </a:r>
-            <a:endParaRPr lang="en-US" sz="1300" dirty="0"/>
-          </a:p>
-        </p:txBody>
-      </p:sp>
-      <p:sp>
-        <p:nvSpPr>
-          <p:cNvPr id="7" name="Text 5"/>
-          <p:cNvSpPr/>
-          <p:nvPr/>
-        </p:nvSpPr>
-        <p:spPr>
-          <a:xfrm>
-            <a:off x="692051" y="1343174"/>
-            <a:ext cx="7973389" cy="230981"/>
-          </a:xfrm>
-          <a:prstGeom prst="rect">
-            <a:avLst/>
-          </a:prstGeom>
-          <a:noFill/>
-          <a:ln/>
-        </p:spPr>
-        <p:txBody>
-          <a:bodyPr wrap="square" lIns="0" tIns="0" rIns="0" bIns="0" rtlCol="0" anchor="t"/>
-          <a:lstStyle/>
-          <a:p>
-            <a:pPr algn="l" indent="0" marL="0">
-              <a:lnSpc>
-                <a:spcPts val="1820"/>
-              </a:lnSpc>
-              <a:spcBef>
-                <a:spcPts val="300"/>
-              </a:spcBef>
-              <a:spcAft>
-                <a:spcPts val="300"/>
-              </a:spcAft>
-              <a:buNone/>
-            </a:pPr>
-            <a:r>
-              <a:rPr lang="en-US" sz="1300" i="1" dirty="0">
+                <a:latin typeface="Arial" pitchFamily="34" charset="0"/>
+                <a:ea typeface="Arial" pitchFamily="34" charset="-122"/>
+                <a:cs typeface="Arial" pitchFamily="34" charset="-120"/>
+              </a:rPr>
+              <a:t>Closing namaste in tāḍāsana.</a:t>
+            </a:r>
+            <a:endParaRPr lang="en-US" sz="1200" dirty="0"/>
+          </a:p>
+          <a:p>
+            <a:pPr algn="l" marL="342900" indent="-342900">
+              <a:lnSpc>
+                <a:spcPts val="1620"/>
+              </a:lnSpc>
+              <a:spcAft>
+                <a:spcPts val="300"/>
+              </a:spcAft>
+              <a:buSzPct val="100000"/>
+              <a:buChar char="•"/>
+            </a:pPr>
+            <a:r>
+              <a:rPr lang="en-US" sz="1200" dirty="0">
                 <a:solidFill>
                   <a:srgbClr val="1C2833"/>
                 </a:solidFill>
-                <a:latin typeface="Georgia" pitchFamily="34" charset="0"/>
-                <a:ea typeface="Georgia" pitchFamily="34" charset="-122"/>
-                <a:cs typeface="Georgia" pitchFamily="34" charset="-120"/>
-              </a:rPr>
-              <a:t>20-min quiz first (closed notebook).</a:t>
-            </a:r>
-            <a:endParaRPr lang="en-US" sz="1300" dirty="0"/>
-          </a:p>
-        </p:txBody>
-      </p:sp>
-      <p:sp>
-        <p:nvSpPr>
-          <p:cNvPr id="8" name="Text 6"/>
-          <p:cNvSpPr/>
-          <p:nvPr/>
-        </p:nvSpPr>
-        <p:spPr>
-          <a:xfrm>
-            <a:off x="692051" y="1612255"/>
-            <a:ext cx="7973389" cy="230981"/>
-          </a:xfrm>
-          <a:prstGeom prst="rect">
-            <a:avLst/>
-          </a:prstGeom>
-          <a:noFill/>
-          <a:ln/>
-        </p:spPr>
-        <p:txBody>
-          <a:bodyPr wrap="square" lIns="0" tIns="0" rIns="0" bIns="0" rtlCol="0" anchor="t"/>
-          <a:lstStyle/>
-          <a:p>
-            <a:pPr algn="l" indent="0" marL="0">
-              <a:lnSpc>
-                <a:spcPts val="1820"/>
-              </a:lnSpc>
-              <a:spcBef>
-                <a:spcPts val="300"/>
-              </a:spcBef>
-              <a:spcAft>
-                <a:spcPts val="300"/>
-              </a:spcAft>
-              <a:buNone/>
-            </a:pPr>
-            <a:r>
-              <a:rPr lang="en-US" sz="1300" i="1" dirty="0">
-                <a:solidFill>
-                  <a:srgbClr val="1C2833"/>
-                </a:solidFill>
-                <a:latin typeface="Georgia" pitchFamily="34" charset="0"/>
-                <a:ea typeface="Georgia" pitchFamily="34" charset="-122"/>
-                <a:cs typeface="Georgia" pitchFamily="34" charset="-120"/>
-              </a:rPr>
-              <a:t>5-minute routine showcase. The class will join you on their mats — you LEAD them through your routine.</a:t>
-            </a:r>
-            <a:endParaRPr lang="en-US" sz="1300" dirty="0"/>
-          </a:p>
-        </p:txBody>
-      </p:sp>
-      <p:sp>
-        <p:nvSpPr>
-          <p:cNvPr id="9" name="Text 7"/>
-          <p:cNvSpPr/>
-          <p:nvPr/>
-        </p:nvSpPr>
-        <p:spPr>
-          <a:xfrm>
-            <a:off x="692051" y="1881336"/>
-            <a:ext cx="7973389" cy="692944"/>
-          </a:xfrm>
-          <a:prstGeom prst="rect">
-            <a:avLst/>
-          </a:prstGeom>
-          <a:noFill/>
-          <a:ln/>
-        </p:spPr>
-        <p:txBody>
-          <a:bodyPr wrap="square" lIns="0" tIns="0" rIns="0" bIns="0" rtlCol="0" anchor="t"/>
-          <a:lstStyle/>
-          <a:p>
-            <a:pPr algn="l" indent="0" marL="0">
-              <a:lnSpc>
-                <a:spcPts val="1820"/>
-              </a:lnSpc>
-              <a:spcBef>
-                <a:spcPts val="300"/>
-              </a:spcBef>
-              <a:spcAft>
-                <a:spcPts val="300"/>
-              </a:spcAft>
-              <a:buNone/>
-            </a:pPr>
-            <a:r>
-              <a:rPr lang="en-US" sz="1300" b="1" i="1" dirty="0">
-                <a:solidFill>
-                  <a:srgbClr val="1C2833"/>
-                </a:solidFill>
-                <a:latin typeface="Georgia" pitchFamily="34" charset="0"/>
-                <a:ea typeface="Georgia" pitchFamily="34" charset="-122"/>
-                <a:cs typeface="Georgia" pitchFamily="34" charset="-120"/>
-              </a:rPr>
-              <a:t>Reflection (due at end of class):</a:t>
-            </a:r>
-            <a:pPr algn="l" indent="0" marL="0">
-              <a:lnSpc>
-                <a:spcPts val="1820"/>
-              </a:lnSpc>
-              <a:spcBef>
-                <a:spcPts val="300"/>
-              </a:spcBef>
-              <a:spcAft>
-                <a:spcPts val="300"/>
-              </a:spcAft>
-              <a:buNone/>
-            </a:pPr>
-            <a:r>
-              <a:rPr lang="en-US" sz="1300" dirty="0">
-                <a:solidFill>
-                  <a:srgbClr val="1C2833"/>
-                </a:solidFill>
-                <a:latin typeface="Georgia" pitchFamily="34" charset="0"/>
-                <a:ea typeface="Georgia" pitchFamily="34" charset="-122"/>
-                <a:cs typeface="Georgia" pitchFamily="34" charset="-120"/>
-              </a:rPr>
-              <a:t> 1. What did you set out to make/learn, and what did you actually end up with? 2. What's the most surprising thing you discovered while making this? 3. If you had three more days, what would you do differently?</a:t>
-            </a:r>
-            <a:endParaRPr lang="en-US" sz="1300" dirty="0"/>
-          </a:p>
-        </p:txBody>
-      </p:sp>
-      <p:sp>
-        <p:nvSpPr>
-          <p:cNvPr id="10" name="Text 8"/>
+                <a:latin typeface="Arial" pitchFamily="34" charset="0"/>
+                <a:ea typeface="Arial" pitchFamily="34" charset="-122"/>
+                <a:cs typeface="Arial" pitchFamily="34" charset="-120"/>
+              </a:rPr>
+              <a:t>Reflection slip submitted.</a:t>
+            </a:r>
+            <a:endParaRPr lang="en-US" sz="1200" dirty="0"/>
+          </a:p>
+        </p:txBody>
+      </p:sp>
+      <p:sp>
+        <p:nvSpPr>
+          <p:cNvPr id="5" name="Text 3"/>
           <p:cNvSpPr/>
           <p:nvPr/>
         </p:nvSpPr>
@@ -4794,7 +4921,7 @@
                 <a:ea typeface="Georgia" pitchFamily="34" charset="-122"/>
                 <a:cs typeface="Georgia" pitchFamily="34" charset="-120"/>
               </a:rPr>
-              <a:t>Homework</a:t>
+              <a:t>Student-facing content</a:t>
             </a:r>
             <a:endParaRPr lang="en-US" sz="1800" dirty="0"/>
           </a:p>
@@ -4808,13 +4935,66 @@
         </p:nvSpPr>
         <p:spPr>
           <a:xfrm>
-            <a:off x="406301" y="870942"/>
-            <a:ext cx="8498026" cy="213271"/>
-          </a:xfrm>
-          <a:prstGeom prst="rect">
+            <a:off x="406301" y="883593"/>
+            <a:ext cx="8331398" cy="2226469"/>
+          </a:xfrm>
+          <a:prstGeom prst="rect">
+            <a:avLst/>
+          </a:prstGeom>
+          <a:solidFill>
+            <a:srgbClr val="F4F8F9"/>
+          </a:solidFill>
+          <a:ln/>
+        </p:spPr>
+        <p:txBody>
+          <a:bodyPr wrap="square" rtlCol="0" anchor="ctr"/>
+          <a:lstStyle/>
+          <a:p>
+            <a:pPr indent="0" marL="0">
+              <a:buNone/>
+            </a:pPr>
+            <a:endParaRPr lang="en-US" dirty="0"/>
+          </a:p>
+        </p:txBody>
+      </p:sp>
+      <p:sp>
+        <p:nvSpPr>
+          <p:cNvPr id="5" name="Shape 3"/>
+          <p:cNvSpPr/>
+          <p:nvPr/>
+        </p:nvSpPr>
+        <p:spPr>
+          <a:xfrm>
+            <a:off x="434876" y="883593"/>
+            <a:ext cx="0" cy="2226469"/>
+          </a:xfrm>
+          <a:prstGeom prst="line">
             <a:avLst/>
           </a:prstGeom>
           <a:noFill/>
+          <a:ln w="57150">
+            <a:solidFill>
+              <a:srgbClr val="FE4447"/>
+            </a:solidFill>
+            <a:prstDash val="solid"/>
+          </a:ln>
+        </p:spPr>
+      </p:sp>
+      <p:sp>
+        <p:nvSpPr>
+          <p:cNvPr id="6" name="Text 4"/>
+          <p:cNvSpPr/>
+          <p:nvPr/>
+        </p:nvSpPr>
+        <p:spPr>
+          <a:xfrm>
+            <a:off x="692051" y="1074093"/>
+            <a:ext cx="7973389" cy="230981"/>
+          </a:xfrm>
+          <a:prstGeom prst="rect">
+            <a:avLst/>
+          </a:prstGeom>
+          <a:noFill/>
           <a:ln/>
         </p:spPr>
         <p:txBody>
@@ -4823,7 +5003,7 @@
           <a:p>
             <a:pPr algn="l" indent="0" marL="0">
               <a:lnSpc>
-                <a:spcPts val="1680"/>
+                <a:spcPts val="1820"/>
               </a:lnSpc>
               <a:spcBef>
                 <a:spcPts val="300"/>
@@ -4834,23 +5014,311 @@
               <a:buNone/>
             </a:pPr>
             <a:r>
-              <a:rPr lang="en-US" sz="1200" dirty="0">
+              <a:rPr lang="en-US" sz="1300" b="1" i="1" dirty="0">
                 <a:solidFill>
                   <a:srgbClr val="1C2833"/>
                 </a:solidFill>
-                <a:latin typeface="Arial" pitchFamily="34" charset="0"/>
-                <a:ea typeface="Arial" pitchFamily="34" charset="-122"/>
-                <a:cs typeface="Arial" pitchFamily="34" charset="-120"/>
-              </a:rPr>
-              <a:t>– None. Module complete.</a:t>
-            </a:r>
-            <a:endParaRPr lang="en-US" sz="1200" dirty="0"/>
-          </a:p>
-        </p:txBody>
-      </p:sp>
-      <p:sp>
-        <p:nvSpPr>
-          <p:cNvPr id="5" name="Text 3"/>
+                <a:latin typeface="Georgia" pitchFamily="34" charset="0"/>
+                <a:ea typeface="Georgia" pitchFamily="34" charset="-122"/>
+                <a:cs typeface="Georgia" pitchFamily="34" charset="-120"/>
+              </a:rPr>
+              <a:t>Day 10: quiz + routine showcase</a:t>
+            </a:r>
+            <a:endParaRPr lang="en-US" sz="1300" dirty="0"/>
+          </a:p>
+        </p:txBody>
+      </p:sp>
+      <p:sp>
+        <p:nvSpPr>
+          <p:cNvPr id="7" name="Text 5"/>
+          <p:cNvSpPr/>
+          <p:nvPr/>
+        </p:nvSpPr>
+        <p:spPr>
+          <a:xfrm>
+            <a:off x="692051" y="1343174"/>
+            <a:ext cx="7973389" cy="230981"/>
+          </a:xfrm>
+          <a:prstGeom prst="rect">
+            <a:avLst/>
+          </a:prstGeom>
+          <a:noFill/>
+          <a:ln/>
+        </p:spPr>
+        <p:txBody>
+          <a:bodyPr wrap="square" lIns="0" tIns="0" rIns="0" bIns="0" rtlCol="0" anchor="t"/>
+          <a:lstStyle/>
+          <a:p>
+            <a:pPr algn="l" indent="0" marL="0">
+              <a:lnSpc>
+                <a:spcPts val="1820"/>
+              </a:lnSpc>
+              <a:spcBef>
+                <a:spcPts val="300"/>
+              </a:spcBef>
+              <a:spcAft>
+                <a:spcPts val="300"/>
+              </a:spcAft>
+              <a:buNone/>
+            </a:pPr>
+            <a:r>
+              <a:rPr lang="en-US" sz="1300" i="1" dirty="0">
+                <a:solidFill>
+                  <a:srgbClr val="1C2833"/>
+                </a:solidFill>
+                <a:latin typeface="Georgia" pitchFamily="34" charset="0"/>
+                <a:ea typeface="Georgia" pitchFamily="34" charset="-122"/>
+                <a:cs typeface="Georgia" pitchFamily="34" charset="-120"/>
+              </a:rPr>
+              <a:t>20-min quiz first (closed notebook).</a:t>
+            </a:r>
+            <a:endParaRPr lang="en-US" sz="1300" dirty="0"/>
+          </a:p>
+        </p:txBody>
+      </p:sp>
+      <p:sp>
+        <p:nvSpPr>
+          <p:cNvPr id="8" name="Text 6"/>
+          <p:cNvSpPr/>
+          <p:nvPr/>
+        </p:nvSpPr>
+        <p:spPr>
+          <a:xfrm>
+            <a:off x="692051" y="1612255"/>
+            <a:ext cx="7973389" cy="230981"/>
+          </a:xfrm>
+          <a:prstGeom prst="rect">
+            <a:avLst/>
+          </a:prstGeom>
+          <a:noFill/>
+          <a:ln/>
+        </p:spPr>
+        <p:txBody>
+          <a:bodyPr wrap="square" lIns="0" tIns="0" rIns="0" bIns="0" rtlCol="0" anchor="t"/>
+          <a:lstStyle/>
+          <a:p>
+            <a:pPr algn="l" indent="0" marL="0">
+              <a:lnSpc>
+                <a:spcPts val="1820"/>
+              </a:lnSpc>
+              <a:spcBef>
+                <a:spcPts val="300"/>
+              </a:spcBef>
+              <a:spcAft>
+                <a:spcPts val="300"/>
+              </a:spcAft>
+              <a:buNone/>
+            </a:pPr>
+            <a:r>
+              <a:rPr lang="en-US" sz="1300" i="1" dirty="0">
+                <a:solidFill>
+                  <a:srgbClr val="1C2833"/>
+                </a:solidFill>
+                <a:latin typeface="Georgia" pitchFamily="34" charset="0"/>
+                <a:ea typeface="Georgia" pitchFamily="34" charset="-122"/>
+                <a:cs typeface="Georgia" pitchFamily="34" charset="-120"/>
+              </a:rPr>
+              <a:t>5-minute routine showcase. The class will join you on their mats — you LEAD them through your routine.</a:t>
+            </a:r>
+            <a:endParaRPr lang="en-US" sz="1300" dirty="0"/>
+          </a:p>
+        </p:txBody>
+      </p:sp>
+      <p:sp>
+        <p:nvSpPr>
+          <p:cNvPr id="9" name="Text 7"/>
+          <p:cNvSpPr/>
+          <p:nvPr/>
+        </p:nvSpPr>
+        <p:spPr>
+          <a:xfrm>
+            <a:off x="692051" y="1881336"/>
+            <a:ext cx="7973389" cy="230981"/>
+          </a:xfrm>
+          <a:prstGeom prst="rect">
+            <a:avLst/>
+          </a:prstGeom>
+          <a:noFill/>
+          <a:ln/>
+        </p:spPr>
+        <p:txBody>
+          <a:bodyPr wrap="square" lIns="0" tIns="0" rIns="0" bIns="0" rtlCol="0" anchor="t"/>
+          <a:lstStyle/>
+          <a:p>
+            <a:pPr algn="l" indent="0" marL="0">
+              <a:lnSpc>
+                <a:spcPts val="1820"/>
+              </a:lnSpc>
+              <a:spcBef>
+                <a:spcPts val="300"/>
+              </a:spcBef>
+              <a:spcAft>
+                <a:spcPts val="300"/>
+              </a:spcAft>
+              <a:buNone/>
+            </a:pPr>
+            <a:r>
+              <a:rPr lang="en-US" sz="1300" b="1" i="1" dirty="0">
+                <a:solidFill>
+                  <a:srgbClr val="1C2833"/>
+                </a:solidFill>
+                <a:latin typeface="Georgia" pitchFamily="34" charset="0"/>
+                <a:ea typeface="Georgia" pitchFamily="34" charset="-122"/>
+                <a:cs typeface="Georgia" pitchFamily="34" charset="-120"/>
+              </a:rPr>
+              <a:t>Reflection (due at end of class):</a:t>
+            </a:r>
+            <a:endParaRPr lang="en-US" sz="1300" dirty="0"/>
+          </a:p>
+        </p:txBody>
+      </p:sp>
+      <p:sp>
+        <p:nvSpPr>
+          <p:cNvPr id="10" name="Text 8"/>
+          <p:cNvSpPr/>
+          <p:nvPr/>
+        </p:nvSpPr>
+        <p:spPr>
+          <a:xfrm>
+            <a:off x="692051" y="2150418"/>
+            <a:ext cx="7973389" cy="230981"/>
+          </a:xfrm>
+          <a:prstGeom prst="rect">
+            <a:avLst/>
+          </a:prstGeom>
+          <a:noFill/>
+          <a:ln/>
+        </p:spPr>
+        <p:txBody>
+          <a:bodyPr wrap="square" lIns="0" tIns="0" rIns="0" bIns="0" rtlCol="0" anchor="t"/>
+          <a:lstStyle/>
+          <a:p>
+            <a:pPr algn="l" indent="0" marL="0">
+              <a:lnSpc>
+                <a:spcPts val="1820"/>
+              </a:lnSpc>
+              <a:spcBef>
+                <a:spcPts val="300"/>
+              </a:spcBef>
+              <a:spcAft>
+                <a:spcPts val="300"/>
+              </a:spcAft>
+              <a:buNone/>
+            </a:pPr>
+            <a:r>
+              <a:rPr lang="en-US" sz="1300" i="1" dirty="0">
+                <a:solidFill>
+                  <a:srgbClr val="1C2833"/>
+                </a:solidFill>
+                <a:latin typeface="Georgia" pitchFamily="34" charset="0"/>
+                <a:ea typeface="Georgia" pitchFamily="34" charset="-122"/>
+                <a:cs typeface="Georgia" pitchFamily="34" charset="-120"/>
+              </a:rPr>
+              <a:t>What did you set out to make/learn, and what did you actually end up with?</a:t>
+            </a:r>
+            <a:endParaRPr lang="en-US" sz="1300" dirty="0"/>
+          </a:p>
+        </p:txBody>
+      </p:sp>
+      <p:sp>
+        <p:nvSpPr>
+          <p:cNvPr id="11" name="Text 9"/>
+          <p:cNvSpPr/>
+          <p:nvPr/>
+        </p:nvSpPr>
+        <p:spPr>
+          <a:xfrm>
+            <a:off x="692051" y="2419499"/>
+            <a:ext cx="7973389" cy="230981"/>
+          </a:xfrm>
+          <a:prstGeom prst="rect">
+            <a:avLst/>
+          </a:prstGeom>
+          <a:noFill/>
+          <a:ln/>
+        </p:spPr>
+        <p:txBody>
+          <a:bodyPr wrap="square" lIns="0" tIns="0" rIns="0" bIns="0" rtlCol="0" anchor="t"/>
+          <a:lstStyle/>
+          <a:p>
+            <a:pPr algn="l" indent="0" marL="0">
+              <a:lnSpc>
+                <a:spcPts val="1820"/>
+              </a:lnSpc>
+              <a:spcBef>
+                <a:spcPts val="300"/>
+              </a:spcBef>
+              <a:spcAft>
+                <a:spcPts val="300"/>
+              </a:spcAft>
+              <a:buNone/>
+            </a:pPr>
+            <a:r>
+              <a:rPr lang="en-US" sz="1300" i="1" dirty="0">
+                <a:solidFill>
+                  <a:srgbClr val="1C2833"/>
+                </a:solidFill>
+                <a:latin typeface="Georgia" pitchFamily="34" charset="0"/>
+                <a:ea typeface="Georgia" pitchFamily="34" charset="-122"/>
+                <a:cs typeface="Georgia" pitchFamily="34" charset="-120"/>
+              </a:rPr>
+              <a:t>What's the most surprising thing you discovered while making this?</a:t>
+            </a:r>
+            <a:endParaRPr lang="en-US" sz="1300" dirty="0"/>
+          </a:p>
+        </p:txBody>
+      </p:sp>
+      <p:sp>
+        <p:nvSpPr>
+          <p:cNvPr id="12" name="Text 10"/>
+          <p:cNvSpPr/>
+          <p:nvPr/>
+        </p:nvSpPr>
+        <p:spPr>
+          <a:xfrm>
+            <a:off x="692051" y="2688580"/>
+            <a:ext cx="7973389" cy="230981"/>
+          </a:xfrm>
+          <a:prstGeom prst="rect">
+            <a:avLst/>
+          </a:prstGeom>
+          <a:noFill/>
+          <a:ln/>
+        </p:spPr>
+        <p:txBody>
+          <a:bodyPr wrap="square" lIns="0" tIns="0" rIns="0" bIns="0" rtlCol="0" anchor="t"/>
+          <a:lstStyle/>
+          <a:p>
+            <a:pPr algn="l" indent="0" marL="0">
+              <a:lnSpc>
+                <a:spcPts val="1820"/>
+              </a:lnSpc>
+              <a:spcBef>
+                <a:spcPts val="300"/>
+              </a:spcBef>
+              <a:spcAft>
+                <a:spcPts val="300"/>
+              </a:spcAft>
+              <a:buNone/>
+            </a:pPr>
+            <a:r>
+              <a:rPr lang="en-US" sz="1300" i="1" dirty="0">
+                <a:solidFill>
+                  <a:srgbClr val="1C2833"/>
+                </a:solidFill>
+                <a:latin typeface="Georgia" pitchFamily="34" charset="0"/>
+                <a:ea typeface="Georgia" pitchFamily="34" charset="-122"/>
+                <a:cs typeface="Georgia" pitchFamily="34" charset="-120"/>
+              </a:rPr>
+              <a:t>If you had three more days, what would you do differently?</a:t>
+            </a:r>
+            <a:endParaRPr lang="en-US" sz="1300" dirty="0"/>
+          </a:p>
+        </p:txBody>
+      </p:sp>
+      <p:sp>
+        <p:nvSpPr>
+          <p:cNvPr id="13" name="Text 11"/>
           <p:cNvSpPr/>
           <p:nvPr/>
         </p:nvSpPr>
